--- a/skills/deck-builder/templates/Kenyon - Basic Presentation Template.pptx
+++ b/skills/deck-builder/templates/Kenyon - Basic Presentation Template.pptx
@@ -212,7 +212,7 @@
           <a:p>
             <a:fld id="{FD3DFF91-E63B-E948-B3A5-1D1BF1CECDF7}" type="datetimeFigureOut">
               <a:rPr lang="en-US" smtClean="0"/>
-              <a:t>5/28/26</a:t>
+              <a:t>6/12/26</a:t>
             </a:fld>
             <a:endParaRPr lang="en-US"/>
           </a:p>
@@ -1007,41 +1007,12 @@
           </a:p>
         </p:txBody>
       </p:sp>
-      <p:pic>
-        <p:nvPicPr>
-          <p:cNvPr id="6" name="Picture 5">
-            <a:extLst>
-              <a:ext uri="{FF2B5EF4-FFF2-40B4-BE49-F238E27FC236}">
-                <a16:creationId xmlns:a16="http://schemas.microsoft.com/office/drawing/2014/main" id="{90EBB041-6C25-006B-B2E3-00DB27F26BB0}"/>
-              </a:ext>
-            </a:extLst>
-          </p:cNvPr>
-          <p:cNvPicPr>
-            <a:picLocks noChangeAspect="1"/>
-          </p:cNvPicPr>
-          <p:nvPr userDrawn="1"/>
-        </p:nvPicPr>
-        <p:blipFill>
-          <a:blip r:embed="rId3"/>
-          <a:srcRect/>
-          <a:stretch/>
-        </p:blipFill>
-        <p:spPr>
-          <a:xfrm>
-            <a:off x="673784" y="3068575"/>
-            <a:ext cx="3434827" cy="576311"/>
-          </a:xfrm>
-          <a:prstGeom prst="rect">
-            <a:avLst/>
-          </a:prstGeom>
-        </p:spPr>
-      </p:pic>
-      <p:sp>
-        <p:nvSpPr>
-          <p:cNvPr id="7" name="Rounded Rectangle 6">
-            <a:extLst>
-              <a:ext uri="{FF2B5EF4-FFF2-40B4-BE49-F238E27FC236}">
-                <a16:creationId xmlns:a16="http://schemas.microsoft.com/office/drawing/2014/main" id="{DECE5C3A-7D84-D2F3-8F8F-22255907DB0C}"/>
+      <p:sp>
+        <p:nvSpPr>
+          <p:cNvPr id="5" name="Rounded Rectangle 4">
+            <a:extLst>
+              <a:ext uri="{FF2B5EF4-FFF2-40B4-BE49-F238E27FC236}">
+                <a16:creationId xmlns:a16="http://schemas.microsoft.com/office/drawing/2014/main" id="{4A46FFE0-52A4-5CDF-3EC6-462363D8D60A}"/>
               </a:ext>
             </a:extLst>
           </p:cNvPr>
@@ -1050,8 +1021,8 @@
         </p:nvSpPr>
         <p:spPr>
           <a:xfrm>
-            <a:off x="4593515" y="-1269401"/>
-            <a:ext cx="8961120" cy="4914288"/>
+            <a:off x="5496673" y="-1269401"/>
+            <a:ext cx="8057961" cy="4914288"/>
           </a:xfrm>
           <a:prstGeom prst="roundRect">
             <a:avLst>
@@ -1090,6 +1061,35 @@
           </a:p>
         </p:txBody>
       </p:sp>
+      <p:pic>
+        <p:nvPicPr>
+          <p:cNvPr id="8" name="Picture 7">
+            <a:extLst>
+              <a:ext uri="{FF2B5EF4-FFF2-40B4-BE49-F238E27FC236}">
+                <a16:creationId xmlns:a16="http://schemas.microsoft.com/office/drawing/2014/main" id="{7354F841-5A1C-B0EF-9428-0ABB2F53F494}"/>
+              </a:ext>
+            </a:extLst>
+          </p:cNvPr>
+          <p:cNvPicPr>
+            <a:picLocks noChangeAspect="1"/>
+          </p:cNvPicPr>
+          <p:nvPr userDrawn="1"/>
+        </p:nvPicPr>
+        <p:blipFill>
+          <a:blip r:embed="rId3"/>
+          <a:srcRect/>
+          <a:stretch/>
+        </p:blipFill>
+        <p:spPr>
+          <a:xfrm>
+            <a:off x="9141449" y="2971800"/>
+            <a:ext cx="2325905" cy="390251"/>
+          </a:xfrm>
+          <a:prstGeom prst="rect">
+            <a:avLst/>
+          </a:prstGeom>
+        </p:spPr>
+      </p:pic>
     </p:spTree>
     <p:extLst>
       <p:ext uri="{BB962C8B-B14F-4D97-AF65-F5344CB8AC3E}">
@@ -9057,12 +9057,48 @@
           <a:p>
             <a:fld id="{C8A1BA17-5FCD-E84E-BA65-AF5582366495}" type="datetime4">
               <a:rPr lang="en-GB" smtClean="0"/>
-              <a:t>28 May 2026</a:t>
+              <a:t>12 June 2026</a:t>
             </a:fld>
             <a:endParaRPr lang="en-US" dirty="0"/>
           </a:p>
         </p:txBody>
       </p:sp>
+      <p:pic>
+        <p:nvPicPr>
+          <p:cNvPr id="6" name="Graphic 5">
+            <a:extLst>
+              <a:ext uri="{FF2B5EF4-FFF2-40B4-BE49-F238E27FC236}">
+                <a16:creationId xmlns:a16="http://schemas.microsoft.com/office/drawing/2014/main" id="{C934C37D-85A8-DBAE-D088-9A2AC03DCA57}"/>
+              </a:ext>
+            </a:extLst>
+          </p:cNvPr>
+          <p:cNvPicPr>
+            <a:picLocks noChangeAspect="1"/>
+          </p:cNvPicPr>
+          <p:nvPr/>
+        </p:nvPicPr>
+        <p:blipFill>
+          <a:blip>
+            <a:extLst>
+              <a:ext uri="{96DAC541-7B7A-43D3-8B79-37D633B846F1}">
+                <asvg:svgBlip xmlns:asvg="http://schemas.microsoft.com/office/drawing/2016/SVG/main" r:embed="rId2"/>
+              </a:ext>
+            </a:extLst>
+          </a:blip>
+          <a:stretch>
+            <a:fillRect/>
+          </a:stretch>
+        </p:blipFill>
+        <p:spPr>
+          <a:xfrm>
+            <a:off x="1519681" y="3096601"/>
+            <a:ext cx="3067050" cy="484271"/>
+          </a:xfrm>
+          <a:prstGeom prst="rect">
+            <a:avLst/>
+          </a:prstGeom>
+        </p:spPr>
+      </p:pic>
     </p:spTree>
     <p:extLst>
       <p:ext uri="{BB962C8B-B14F-4D97-AF65-F5344CB8AC3E}">
@@ -12660,6 +12696,26 @@
 </file>
 
 <file path=customXml/item1.xml><?xml version="1.0" encoding="utf-8"?>
+<?mso-contentType ?>
+<FormTemplates xmlns="http://schemas.microsoft.com/sharepoint/v3/contenttype/forms">
+  <Display>DocumentLibraryForm</Display>
+  <Edit>DocumentLibraryForm</Edit>
+  <New>DocumentLibraryForm</New>
+</FormTemplates>
+</file>
+
+<file path=customXml/item2.xml><?xml version="1.0" encoding="utf-8"?>
+<p:properties xmlns:p="http://schemas.microsoft.com/office/2006/metadata/properties" xmlns:xsi="http://www.w3.org/2001/XMLSchema-instance" xmlns:pc="http://schemas.microsoft.com/office/infopath/2007/PartnerControls">
+  <documentManagement>
+    <lcf76f155ced4ddcb4097134ff3c332f xmlns="786f6ea3-4ea6-437c-a297-c135d4f2e74c">
+      <Terms xmlns="http://schemas.microsoft.com/office/infopath/2007/PartnerControls"/>
+    </lcf76f155ced4ddcb4097134ff3c332f>
+    <TaxCatchAll xmlns="f61f66a0-0880-4c0b-b123-6e5c0c961f27" xsi:nil="true"/>
+  </documentManagement>
+</p:properties>
+</file>
+
+<file path=customXml/item3.xml><?xml version="1.0" encoding="utf-8"?>
 <ct:contentTypeSchema xmlns:ct="http://schemas.microsoft.com/office/2006/metadata/contentType" xmlns:ma="http://schemas.microsoft.com/office/2006/metadata/properties/metaAttributes" ct:_="" ma:_="" ma:contentTypeName="Document" ma:contentTypeID="0x010100128ECDB296534D4A9769597AD82280A0" ma:contentTypeVersion="13" ma:contentTypeDescription="Create a new document." ma:contentTypeScope="" ma:versionID="e87e6628bbf81cd255d30c48b4445ae1">
   <xsd:schema xmlns:xsd="http://www.w3.org/2001/XMLSchema" xmlns:xs="http://www.w3.org/2001/XMLSchema" xmlns:p="http://schemas.microsoft.com/office/2006/metadata/properties" xmlns:ns2="786f6ea3-4ea6-437c-a297-c135d4f2e74c" xmlns:ns3="f61f66a0-0880-4c0b-b123-6e5c0c961f27" targetNamespace="http://schemas.microsoft.com/office/2006/metadata/properties" ma:root="true" ma:fieldsID="213364783f13fe8fce2791cc90fb8a52" ns2:_="" ns3:_="">
     <xsd:import namespace="786f6ea3-4ea6-437c-a297-c135d4f2e74c"/>
@@ -12860,41 +12916,10 @@
 </ct:contentTypeSchema>
 </file>
 
-<file path=customXml/item2.xml><?xml version="1.0" encoding="utf-8"?>
-<p:properties xmlns:p="http://schemas.microsoft.com/office/2006/metadata/properties" xmlns:xsi="http://www.w3.org/2001/XMLSchema-instance" xmlns:pc="http://schemas.microsoft.com/office/infopath/2007/PartnerControls">
-  <documentManagement>
-    <lcf76f155ced4ddcb4097134ff3c332f xmlns="786f6ea3-4ea6-437c-a297-c135d4f2e74c">
-      <Terms xmlns="http://schemas.microsoft.com/office/infopath/2007/PartnerControls"/>
-    </lcf76f155ced4ddcb4097134ff3c332f>
-    <TaxCatchAll xmlns="f61f66a0-0880-4c0b-b123-6e5c0c961f27" xsi:nil="true"/>
-  </documentManagement>
-</p:properties>
-</file>
-
-<file path=customXml/item3.xml><?xml version="1.0" encoding="utf-8"?>
-<?mso-contentType ?>
-<FormTemplates xmlns="http://schemas.microsoft.com/sharepoint/v3/contenttype/forms">
-  <Display>DocumentLibraryForm</Display>
-  <Edit>DocumentLibraryForm</Edit>
-  <New>DocumentLibraryForm</New>
-</FormTemplates>
-</file>
-
 <file path=customXml/itemProps1.xml><?xml version="1.0" encoding="utf-8"?>
-<ds:datastoreItem xmlns:ds="http://schemas.openxmlformats.org/officeDocument/2006/customXml" ds:itemID="{B26961EF-F0F6-44FB-A519-21391519460D}">
+<ds:datastoreItem xmlns:ds="http://schemas.openxmlformats.org/officeDocument/2006/customXml" ds:itemID="{DAB22FEE-1B56-42A8-8CFB-FF76A629D598}">
   <ds:schemaRefs>
-    <ds:schemaRef ds:uri="http://schemas.microsoft.com/office/2006/metadata/contentType"/>
-    <ds:schemaRef ds:uri="http://schemas.microsoft.com/office/2006/metadata/properties/metaAttributes"/>
-    <ds:schemaRef ds:uri="http://www.w3.org/2001/XMLSchema"/>
-    <ds:schemaRef ds:uri="http://schemas.microsoft.com/office/2006/metadata/properties"/>
-    <ds:schemaRef ds:uri="786f6ea3-4ea6-437c-a297-c135d4f2e74c"/>
-    <ds:schemaRef ds:uri="f61f66a0-0880-4c0b-b123-6e5c0c961f27"/>
-    <ds:schemaRef ds:uri="http://schemas.microsoft.com/office/2006/documentManagement/types"/>
-    <ds:schemaRef ds:uri="http://schemas.microsoft.com/office/infopath/2007/PartnerControls"/>
-    <ds:schemaRef ds:uri="http://schemas.openxmlformats.org/package/2006/metadata/core-properties"/>
-    <ds:schemaRef ds:uri="http://purl.org/dc/elements/1.1/"/>
-    <ds:schemaRef ds:uri="http://purl.org/dc/terms/"/>
-    <ds:schemaRef ds:uri="http://schemas.microsoft.com/internal/obd"/>
+    <ds:schemaRef ds:uri="http://schemas.microsoft.com/sharepoint/v3/contenttype/forms"/>
   </ds:schemaRefs>
 </ds:datastoreItem>
 </file>
@@ -12917,9 +12942,20 @@
 </file>
 
 <file path=customXml/itemProps3.xml><?xml version="1.0" encoding="utf-8"?>
-<ds:datastoreItem xmlns:ds="http://schemas.openxmlformats.org/officeDocument/2006/customXml" ds:itemID="{DAB22FEE-1B56-42A8-8CFB-FF76A629D598}">
+<ds:datastoreItem xmlns:ds="http://schemas.openxmlformats.org/officeDocument/2006/customXml" ds:itemID="{B26961EF-F0F6-44FB-A519-21391519460D}">
   <ds:schemaRefs>
-    <ds:schemaRef ds:uri="http://schemas.microsoft.com/sharepoint/v3/contenttype/forms"/>
+    <ds:schemaRef ds:uri="http://schemas.microsoft.com/office/2006/metadata/contentType"/>
+    <ds:schemaRef ds:uri="http://schemas.microsoft.com/office/2006/metadata/properties/metaAttributes"/>
+    <ds:schemaRef ds:uri="http://www.w3.org/2001/XMLSchema"/>
+    <ds:schemaRef ds:uri="http://schemas.microsoft.com/office/2006/metadata/properties"/>
+    <ds:schemaRef ds:uri="786f6ea3-4ea6-437c-a297-c135d4f2e74c"/>
+    <ds:schemaRef ds:uri="f61f66a0-0880-4c0b-b123-6e5c0c961f27"/>
+    <ds:schemaRef ds:uri="http://schemas.microsoft.com/office/2006/documentManagement/types"/>
+    <ds:schemaRef ds:uri="http://schemas.microsoft.com/office/infopath/2007/PartnerControls"/>
+    <ds:schemaRef ds:uri="http://schemas.openxmlformats.org/package/2006/metadata/core-properties"/>
+    <ds:schemaRef ds:uri="http://purl.org/dc/elements/1.1/"/>
+    <ds:schemaRef ds:uri="http://purl.org/dc/terms/"/>
+    <ds:schemaRef ds:uri="http://schemas.microsoft.com/internal/obd"/>
   </ds:schemaRefs>
 </ds:datastoreItem>
 </file>